--- a/data-eng/decks/w2d4s1.pptx
+++ b/data-eng/decks/w2d4s1.pptx
@@ -3100,7 +3100,7 @@
       <p:grpSpPr/>
       <p:sp>
         <p:nvSpPr>
-          <p:cNvPr id="2" name="Oval 1"/>
+          <p:cNvPr id="2" name="deckgen:decor"/>
           <p:cNvSpPr/>
           <p:nvPr/>
         </p:nvSpPr>
@@ -3130,7 +3130,7 @@
       </p:sp>
       <p:sp>
         <p:nvSpPr>
-          <p:cNvPr id="3" name="Oval 2"/>
+          <p:cNvPr id="3" name="deckgen:decor"/>
           <p:cNvSpPr/>
           <p:nvPr/>
         </p:nvSpPr>
@@ -3160,7 +3160,7 @@
       </p:sp>
       <p:sp>
         <p:nvSpPr>
-          <p:cNvPr id="4" name="Oval 3"/>
+          <p:cNvPr id="4" name="deckgen:decor"/>
           <p:cNvSpPr/>
           <p:nvPr/>
         </p:nvSpPr>
@@ -3190,7 +3190,7 @@
       </p:sp>
       <p:sp>
         <p:nvSpPr>
-          <p:cNvPr id="5" name="Rectangle 4"/>
+          <p:cNvPr id="5" name="deckgen:decor"/>
           <p:cNvSpPr/>
           <p:nvPr/>
         </p:nvSpPr>
@@ -3220,7 +3220,7 @@
       </p:sp>
       <p:sp>
         <p:nvSpPr>
-          <p:cNvPr id="6" name="Oval 5"/>
+          <p:cNvPr id="6" name="deckgen:decor"/>
           <p:cNvSpPr/>
           <p:nvPr/>
         </p:nvSpPr>
@@ -3250,7 +3250,7 @@
       </p:sp>
       <p:sp>
         <p:nvSpPr>
-          <p:cNvPr id="7" name="Oval 6"/>
+          <p:cNvPr id="7" name="deckgen:decor"/>
           <p:cNvSpPr/>
           <p:nvPr/>
         </p:nvSpPr>
@@ -3280,7 +3280,7 @@
       </p:sp>
       <p:sp>
         <p:nvSpPr>
-          <p:cNvPr id="8" name="Oval 7"/>
+          <p:cNvPr id="8" name="deckgen:decor"/>
           <p:cNvSpPr/>
           <p:nvPr/>
         </p:nvSpPr>
@@ -3310,7 +3310,7 @@
       </p:sp>
       <p:sp>
         <p:nvSpPr>
-          <p:cNvPr id="9" name="Oval 8"/>
+          <p:cNvPr id="9" name="deckgen:decor"/>
           <p:cNvSpPr/>
           <p:nvPr/>
         </p:nvSpPr>
@@ -3340,7 +3340,7 @@
       </p:sp>
       <p:sp>
         <p:nvSpPr>
-          <p:cNvPr id="10" name="Rectangle 9"/>
+          <p:cNvPr id="10" name="deckgen:decor"/>
           <p:cNvSpPr/>
           <p:nvPr/>
         </p:nvSpPr>
@@ -3600,7 +3600,7 @@
       <p:grpSpPr/>
       <p:sp>
         <p:nvSpPr>
-          <p:cNvPr id="2" name="Oval 1"/>
+          <p:cNvPr id="2" name="deckgen:decor"/>
           <p:cNvSpPr/>
           <p:nvPr/>
         </p:nvSpPr>
@@ -3630,7 +3630,7 @@
       </p:sp>
       <p:sp>
         <p:nvSpPr>
-          <p:cNvPr id="3" name="Oval 2"/>
+          <p:cNvPr id="3" name="deckgen:decor"/>
           <p:cNvSpPr/>
           <p:nvPr/>
         </p:nvSpPr>
@@ -3660,7 +3660,7 @@
       </p:sp>
       <p:sp>
         <p:nvSpPr>
-          <p:cNvPr id="4" name="Oval 3"/>
+          <p:cNvPr id="4" name="deckgen:decor"/>
           <p:cNvSpPr/>
           <p:nvPr/>
         </p:nvSpPr>
@@ -4662,7 +4662,7 @@
       <p:grpSpPr/>
       <p:sp>
         <p:nvSpPr>
-          <p:cNvPr id="2" name="Oval 1"/>
+          <p:cNvPr id="2" name="deckgen:decor"/>
           <p:cNvSpPr/>
           <p:nvPr/>
         </p:nvSpPr>
@@ -4692,7 +4692,7 @@
       </p:sp>
       <p:sp>
         <p:nvSpPr>
-          <p:cNvPr id="3" name="Oval 2"/>
+          <p:cNvPr id="3" name="deckgen:decor"/>
           <p:cNvSpPr/>
           <p:nvPr/>
         </p:nvSpPr>
@@ -5444,7 +5444,7 @@
                 <a:ea typeface="Pretendard"/>
                 <a:cs typeface="Pretendard"/>
               </a:rPr>
-              <a:t>de-mysql 기동 · Workbench 또는 종이</a:t>
+              <a:t>mysql&gt; 접속 창 · 종이나 그림 도구</a:t>
             </a:r>
           </a:p>
         </p:txBody>
@@ -5469,7 +5469,7 @@
       <p:grpSpPr/>
       <p:sp>
         <p:nvSpPr>
-          <p:cNvPr id="2" name="Oval 1"/>
+          <p:cNvPr id="2" name="deckgen:decor"/>
           <p:cNvSpPr/>
           <p:nvPr/>
         </p:nvSpPr>
@@ -5499,7 +5499,7 @@
       </p:sp>
       <p:sp>
         <p:nvSpPr>
-          <p:cNvPr id="3" name="Oval 2"/>
+          <p:cNvPr id="3" name="deckgen:decor"/>
           <p:cNvSpPr/>
           <p:nvPr/>
         </p:nvSpPr>
@@ -5529,7 +5529,7 @@
       </p:sp>
       <p:sp>
         <p:nvSpPr>
-          <p:cNvPr id="4" name="Oval 3"/>
+          <p:cNvPr id="4" name="deckgen:decor"/>
           <p:cNvSpPr/>
           <p:nvPr/>
         </p:nvSpPr>
@@ -6460,7 +6460,7 @@
       <p:grpSpPr/>
       <p:sp>
         <p:nvSpPr>
-          <p:cNvPr id="2" name="Oval 1"/>
+          <p:cNvPr id="2" name="deckgen:decor"/>
           <p:cNvSpPr/>
           <p:nvPr/>
         </p:nvSpPr>
@@ -6490,7 +6490,7 @@
       </p:sp>
       <p:sp>
         <p:nvSpPr>
-          <p:cNvPr id="3" name="Oval 2"/>
+          <p:cNvPr id="3" name="deckgen:decor"/>
           <p:cNvSpPr/>
           <p:nvPr/>
         </p:nvSpPr>
@@ -6520,7 +6520,7 @@
       </p:sp>
       <p:sp>
         <p:nvSpPr>
-          <p:cNvPr id="4" name="Oval 3"/>
+          <p:cNvPr id="4" name="deckgen:decor"/>
           <p:cNvSpPr/>
           <p:nvPr/>
         </p:nvSpPr>
@@ -7487,7 +7487,7 @@
       <p:grpSpPr/>
       <p:sp>
         <p:nvSpPr>
-          <p:cNvPr id="2" name="Oval 1"/>
+          <p:cNvPr id="2" name="deckgen:decor"/>
           <p:cNvSpPr/>
           <p:nvPr/>
         </p:nvSpPr>
@@ -7517,7 +7517,7 @@
       </p:sp>
       <p:sp>
         <p:nvSpPr>
-          <p:cNvPr id="3" name="Oval 2"/>
+          <p:cNvPr id="3" name="deckgen:decor"/>
           <p:cNvSpPr/>
           <p:nvPr/>
         </p:nvSpPr>
@@ -7547,7 +7547,7 @@
       </p:sp>
       <p:sp>
         <p:nvSpPr>
-          <p:cNvPr id="4" name="Oval 3"/>
+          <p:cNvPr id="4" name="deckgen:decor"/>
           <p:cNvSpPr/>
           <p:nvPr/>
         </p:nvSpPr>
@@ -8748,7 +8748,7 @@
       <p:grpSpPr/>
       <p:sp>
         <p:nvSpPr>
-          <p:cNvPr id="2" name="Oval 1"/>
+          <p:cNvPr id="2" name="deckgen:decor"/>
           <p:cNvSpPr/>
           <p:nvPr/>
         </p:nvSpPr>
@@ -8778,7 +8778,7 @@
       </p:sp>
       <p:sp>
         <p:nvSpPr>
-          <p:cNvPr id="3" name="Oval 2"/>
+          <p:cNvPr id="3" name="deckgen:decor"/>
           <p:cNvSpPr/>
           <p:nvPr/>
         </p:nvSpPr>
@@ -8808,7 +8808,7 @@
       </p:sp>
       <p:sp>
         <p:nvSpPr>
-          <p:cNvPr id="4" name="Oval 3"/>
+          <p:cNvPr id="4" name="deckgen:decor"/>
           <p:cNvSpPr/>
           <p:nvPr/>
         </p:nvSpPr>
@@ -9944,7 +9944,7 @@
       <p:grpSpPr/>
       <p:sp>
         <p:nvSpPr>
-          <p:cNvPr id="2" name="Oval 1"/>
+          <p:cNvPr id="2" name="deckgen:decor"/>
           <p:cNvSpPr/>
           <p:nvPr/>
         </p:nvSpPr>
@@ -9974,7 +9974,7 @@
       </p:sp>
       <p:sp>
         <p:nvSpPr>
-          <p:cNvPr id="3" name="Oval 2"/>
+          <p:cNvPr id="3" name="deckgen:decor"/>
           <p:cNvSpPr/>
           <p:nvPr/>
         </p:nvSpPr>
@@ -10004,7 +10004,7 @@
       </p:sp>
       <p:sp>
         <p:nvSpPr>
-          <p:cNvPr id="4" name="Oval 3"/>
+          <p:cNvPr id="4" name="deckgen:decor"/>
           <p:cNvSpPr/>
           <p:nvPr/>
         </p:nvSpPr>
@@ -11435,7 +11435,7 @@
       <p:grpSpPr/>
       <p:sp>
         <p:nvSpPr>
-          <p:cNvPr id="2" name="Oval 1"/>
+          <p:cNvPr id="2" name="deckgen:decor"/>
           <p:cNvSpPr/>
           <p:nvPr/>
         </p:nvSpPr>
@@ -11465,7 +11465,7 @@
       </p:sp>
       <p:sp>
         <p:nvSpPr>
-          <p:cNvPr id="3" name="Oval 2"/>
+          <p:cNvPr id="3" name="deckgen:decor"/>
           <p:cNvSpPr/>
           <p:nvPr/>
         </p:nvSpPr>
@@ -11495,7 +11495,7 @@
       </p:sp>
       <p:sp>
         <p:nvSpPr>
-          <p:cNvPr id="4" name="Oval 3"/>
+          <p:cNvPr id="4" name="deckgen:decor"/>
           <p:cNvSpPr/>
           <p:nvPr/>
         </p:nvSpPr>
@@ -12696,7 +12696,7 @@
       <p:grpSpPr/>
       <p:sp>
         <p:nvSpPr>
-          <p:cNvPr id="2" name="Oval 1"/>
+          <p:cNvPr id="2" name="deckgen:decor"/>
           <p:cNvSpPr/>
           <p:nvPr/>
         </p:nvSpPr>
@@ -12726,7 +12726,7 @@
       </p:sp>
       <p:sp>
         <p:nvSpPr>
-          <p:cNvPr id="3" name="Oval 2"/>
+          <p:cNvPr id="3" name="deckgen:decor"/>
           <p:cNvSpPr/>
           <p:nvPr/>
         </p:nvSpPr>
@@ -12756,7 +12756,7 @@
       </p:sp>
       <p:sp>
         <p:nvSpPr>
-          <p:cNvPr id="4" name="Oval 3"/>
+          <p:cNvPr id="4" name="deckgen:decor"/>
           <p:cNvSpPr/>
           <p:nvPr/>
         </p:nvSpPr>
@@ -13452,7 +13452,7 @@
                 <a:ea typeface="Pretendard"/>
                 <a:cs typeface="Pretendard"/>
               </a:rPr>
-              <a:t>주문 표의 고객 전화번호는 주문번호가 아니라 고객에게 딸린 사실</a:t>
+              <a:t>주문 시점 가격처럼 그 시점 값을 보존해야 하는 것만 알고 중복시킨다</a:t>
             </a:r>
           </a:p>
         </p:txBody>
@@ -13723,7 +13723,7 @@
       <p:grpSpPr/>
       <p:sp>
         <p:nvSpPr>
-          <p:cNvPr id="2" name="Oval 1"/>
+          <p:cNvPr id="2" name="deckgen:decor"/>
           <p:cNvSpPr/>
           <p:nvPr/>
         </p:nvSpPr>
@@ -13753,7 +13753,7 @@
       </p:sp>
       <p:sp>
         <p:nvSpPr>
-          <p:cNvPr id="3" name="Oval 2"/>
+          <p:cNvPr id="3" name="deckgen:decor"/>
           <p:cNvSpPr/>
           <p:nvPr/>
         </p:nvSpPr>
@@ -13783,7 +13783,7 @@
       </p:sp>
       <p:sp>
         <p:nvSpPr>
-          <p:cNvPr id="4" name="Oval 3"/>
+          <p:cNvPr id="4" name="deckgen:decor"/>
           <p:cNvSpPr/>
           <p:nvPr/>
         </p:nvSpPr>
